--- a/KdG - Multi-Tenant Applications.pptx
+++ b/KdG - Multi-Tenant Applications.pptx
@@ -6,10 +6,10 @@
     <p:sldMasterId id="2147483669" r:id="rId5"/>
   </p:sldMasterIdLst>
   <p:notesMasterIdLst>
-    <p:notesMasterId r:id="rId62"/>
+    <p:notesMasterId r:id="rId65"/>
   </p:notesMasterIdLst>
   <p:handoutMasterIdLst>
-    <p:handoutMasterId r:id="rId63"/>
+    <p:handoutMasterId r:id="rId66"/>
   </p:handoutMasterIdLst>
   <p:sldIdLst>
     <p:sldId id="256" r:id="rId6"/>
@@ -67,7 +67,10 @@
     <p:sldId id="306" r:id="rId58"/>
     <p:sldId id="300" r:id="rId59"/>
     <p:sldId id="301" r:id="rId60"/>
-    <p:sldId id="313" r:id="rId61"/>
+    <p:sldId id="314" r:id="rId61"/>
+    <p:sldId id="315" r:id="rId62"/>
+    <p:sldId id="316" r:id="rId63"/>
+    <p:sldId id="313" r:id="rId64"/>
   </p:sldIdLst>
   <p:sldSz cx="12192000" cy="6858000"/>
   <p:notesSz cx="6858000" cy="9144000"/>
@@ -290,7 +293,7 @@
           <a:p>
             <a:fld id="{3532B83F-F844-4C18-98E8-7C33F4B39DE0}" type="datetimeFigureOut">
               <a:rPr lang="nl-NL" smtClean="0"/>
-              <a:t>04-04-2025</a:t>
+              <a:t>23-03-2026</a:t>
             </a:fld>
             <a:endParaRPr lang="nl-NL"/>
           </a:p>
@@ -467,7 +470,7 @@
           <a:p>
             <a:fld id="{27396D34-C2B8-41FF-AE69-48AE3B3D8E8B}" type="datetimeFigureOut">
               <a:rPr lang="nl-NL" smtClean="0"/>
-              <a:t>04-04-2025</a:t>
+              <a:t>23-03-2026</a:t>
             </a:fld>
             <a:endParaRPr lang="nl-NL"/>
           </a:p>
@@ -864,6 +867,8 @@
               </a:rPr>
               <a:t>#b956ff</a:t>
             </a:r>
+          </a:p>
+          <a:p>
             <a:br>
               <a:rPr lang="en-US" b="1" dirty="0">
                 <a:solidFill>
@@ -907,6 +912,387 @@
                 <a:effectLst/>
               </a:rPr>
               <a:t>Vermilion_City_FRLG.png</a:t>
+            </a:r>
+            <a:br>
+              <a:rPr lang="en-US" dirty="0">
+                <a:solidFill>
+                  <a:srgbClr val="0093A1"/>
+                </a:solidFill>
+                <a:effectLst/>
+              </a:rPr>
+            </a:br>
+            <a:endParaRPr lang="en-US" dirty="0">
+              <a:solidFill>
+                <a:srgbClr val="0093A1"/>
+              </a:solidFill>
+              <a:effectLst/>
+            </a:endParaRPr>
+          </a:p>
+          <a:p>
+            <a:endParaRPr lang="en-US" dirty="0">
+              <a:solidFill>
+                <a:srgbClr val="0093A1"/>
+              </a:solidFill>
+              <a:effectLst/>
+            </a:endParaRPr>
+          </a:p>
+          <a:p>
+            <a:pPr marL="0" marR="0" indent="0" algn="l" defTabSz="914400" rtl="0" eaLnBrk="1" fontAlgn="auto" latinLnBrk="0" hangingPunct="1">
+              <a:lnSpc>
+                <a:spcPct val="100000"/>
+              </a:lnSpc>
+              <a:spcBef>
+                <a:spcPts val="0"/>
+              </a:spcBef>
+              <a:spcAft>
+                <a:spcPts val="0"/>
+              </a:spcAft>
+              <a:buClrTx/>
+              <a:buSzTx/>
+              <a:buFontTx/>
+              <a:buNone/>
+              <a:tabLst/>
+              <a:defRPr/>
+            </a:pPr>
+            <a:r>
+              <a:rPr lang="en-US" dirty="0">
+                <a:solidFill>
+                  <a:srgbClr val="0093A1"/>
+                </a:solidFill>
+                <a:effectLst/>
+              </a:rPr>
+              <a:t> {</a:t>
+            </a:r>
+            <a:br>
+              <a:rPr lang="en-US" dirty="0">
+                <a:solidFill>
+                  <a:srgbClr val="0093A1"/>
+                </a:solidFill>
+                <a:effectLst/>
+              </a:rPr>
+            </a:br>
+            <a:r>
+              <a:rPr lang="en-US" dirty="0">
+                <a:solidFill>
+                  <a:srgbClr val="0093A1"/>
+                </a:solidFill>
+                <a:effectLst/>
+              </a:rPr>
+              <a:t>      "Id": "pallet-town",</a:t>
+            </a:r>
+            <a:br>
+              <a:rPr lang="en-US" dirty="0">
+                <a:solidFill>
+                  <a:srgbClr val="0093A1"/>
+                </a:solidFill>
+                <a:effectLst/>
+              </a:rPr>
+            </a:br>
+            <a:r>
+              <a:rPr lang="en-US" dirty="0">
+                <a:solidFill>
+                  <a:srgbClr val="0093A1"/>
+                </a:solidFill>
+                <a:effectLst/>
+              </a:rPr>
+              <a:t>      "Name": "Pallet Town",</a:t>
+            </a:r>
+            <a:br>
+              <a:rPr lang="en-US" dirty="0">
+                <a:solidFill>
+                  <a:srgbClr val="0093A1"/>
+                </a:solidFill>
+                <a:effectLst/>
+              </a:rPr>
+            </a:br>
+            <a:r>
+              <a:rPr lang="en-US" dirty="0">
+                <a:solidFill>
+                  <a:srgbClr val="0093A1"/>
+                </a:solidFill>
+                <a:effectLst/>
+              </a:rPr>
+              <a:t>      "</a:t>
+            </a:r>
+            <a:r>
+              <a:rPr lang="en-US" dirty="0" err="1">
+                <a:solidFill>
+                  <a:srgbClr val="0093A1"/>
+                </a:solidFill>
+                <a:effectLst/>
+              </a:rPr>
+              <a:t>BackgroundColor</a:t>
+            </a:r>
+            <a:r>
+              <a:rPr lang="en-US" dirty="0">
+                <a:solidFill>
+                  <a:srgbClr val="0093A1"/>
+                </a:solidFill>
+                <a:effectLst/>
+              </a:rPr>
+              <a:t>": "#75d9d7",</a:t>
+            </a:r>
+            <a:br>
+              <a:rPr lang="en-US" dirty="0">
+                <a:solidFill>
+                  <a:srgbClr val="0093A1"/>
+                </a:solidFill>
+                <a:effectLst/>
+              </a:rPr>
+            </a:br>
+            <a:r>
+              <a:rPr lang="en-US" dirty="0">
+                <a:solidFill>
+                  <a:srgbClr val="0093A1"/>
+                </a:solidFill>
+                <a:effectLst/>
+              </a:rPr>
+              <a:t>      "</a:t>
+            </a:r>
+            <a:r>
+              <a:rPr lang="en-US" dirty="0" err="1">
+                <a:solidFill>
+                  <a:srgbClr val="0093A1"/>
+                </a:solidFill>
+                <a:effectLst/>
+              </a:rPr>
+              <a:t>BackgroundImage</a:t>
+            </a:r>
+            <a:r>
+              <a:rPr lang="en-US" dirty="0">
+                <a:solidFill>
+                  <a:srgbClr val="0093A1"/>
+                </a:solidFill>
+                <a:effectLst/>
+              </a:rPr>
+              <a:t>": "https://</a:t>
+            </a:r>
+            <a:r>
+              <a:rPr lang="en-US" dirty="0" err="1">
+                <a:solidFill>
+                  <a:srgbClr val="0093A1"/>
+                </a:solidFill>
+                <a:effectLst/>
+              </a:rPr>
+              <a:t>archives.bulbagarden.net</a:t>
+            </a:r>
+            <a:r>
+              <a:rPr lang="en-US" dirty="0">
+                <a:solidFill>
+                  <a:srgbClr val="0093A1"/>
+                </a:solidFill>
+                <a:effectLst/>
+              </a:rPr>
+              <a:t>/media/upload/7/77/</a:t>
+            </a:r>
+            <a:r>
+              <a:rPr lang="en-US" dirty="0" err="1">
+                <a:solidFill>
+                  <a:srgbClr val="0093A1"/>
+                </a:solidFill>
+                <a:effectLst/>
+              </a:rPr>
+              <a:t>Pallet_Town_FRLG.png</a:t>
+            </a:r>
+            <a:r>
+              <a:rPr lang="en-US" dirty="0">
+                <a:solidFill>
+                  <a:srgbClr val="0093A1"/>
+                </a:solidFill>
+                <a:effectLst/>
+              </a:rPr>
+              <a:t>"</a:t>
+            </a:r>
+            <a:br>
+              <a:rPr lang="en-US" dirty="0">
+                <a:solidFill>
+                  <a:srgbClr val="0093A1"/>
+                </a:solidFill>
+                <a:effectLst/>
+              </a:rPr>
+            </a:br>
+            <a:r>
+              <a:rPr lang="en-US" dirty="0">
+                <a:solidFill>
+                  <a:srgbClr val="0093A1"/>
+                </a:solidFill>
+                <a:effectLst/>
+              </a:rPr>
+              <a:t>    },</a:t>
+            </a:r>
+            <a:br>
+              <a:rPr lang="en-US" dirty="0">
+                <a:solidFill>
+                  <a:srgbClr val="0093A1"/>
+                </a:solidFill>
+                <a:effectLst/>
+              </a:rPr>
+            </a:br>
+            <a:r>
+              <a:rPr lang="en-US" dirty="0">
+                <a:solidFill>
+                  <a:srgbClr val="0093A1"/>
+                </a:solidFill>
+                <a:effectLst/>
+              </a:rPr>
+              <a:t>    {</a:t>
+            </a:r>
+            <a:br>
+              <a:rPr lang="en-US" dirty="0">
+                <a:solidFill>
+                  <a:srgbClr val="0093A1"/>
+                </a:solidFill>
+                <a:effectLst/>
+              </a:rPr>
+            </a:br>
+            <a:r>
+              <a:rPr lang="en-US" dirty="0">
+                <a:solidFill>
+                  <a:srgbClr val="0093A1"/>
+                </a:solidFill>
+                <a:effectLst/>
+              </a:rPr>
+              <a:t>      "Id": "vermillion-city",</a:t>
+            </a:r>
+            <a:br>
+              <a:rPr lang="en-US" dirty="0">
+                <a:solidFill>
+                  <a:srgbClr val="0093A1"/>
+                </a:solidFill>
+                <a:effectLst/>
+              </a:rPr>
+            </a:br>
+            <a:r>
+              <a:rPr lang="en-US" dirty="0">
+                <a:solidFill>
+                  <a:srgbClr val="0093A1"/>
+                </a:solidFill>
+                <a:effectLst/>
+              </a:rPr>
+              <a:t>      "Name": "Vermillion City",</a:t>
+            </a:r>
+            <a:br>
+              <a:rPr lang="en-US" dirty="0">
+                <a:solidFill>
+                  <a:srgbClr val="0093A1"/>
+                </a:solidFill>
+                <a:effectLst/>
+              </a:rPr>
+            </a:br>
+            <a:r>
+              <a:rPr lang="en-US" dirty="0">
+                <a:solidFill>
+                  <a:srgbClr val="0093A1"/>
+                </a:solidFill>
+                <a:effectLst/>
+              </a:rPr>
+              <a:t>      "</a:t>
+            </a:r>
+            <a:r>
+              <a:rPr lang="en-US" dirty="0" err="1">
+                <a:solidFill>
+                  <a:srgbClr val="0093A1"/>
+                </a:solidFill>
+                <a:effectLst/>
+              </a:rPr>
+              <a:t>BackgroundColor</a:t>
+            </a:r>
+            <a:r>
+              <a:rPr lang="en-US" dirty="0">
+                <a:solidFill>
+                  <a:srgbClr val="0093A1"/>
+                </a:solidFill>
+                <a:effectLst/>
+              </a:rPr>
+              <a:t>": "#b956ff ",</a:t>
+            </a:r>
+            <a:br>
+              <a:rPr lang="en-US" dirty="0">
+                <a:solidFill>
+                  <a:srgbClr val="0093A1"/>
+                </a:solidFill>
+                <a:effectLst/>
+              </a:rPr>
+            </a:br>
+            <a:r>
+              <a:rPr lang="en-US" dirty="0">
+                <a:solidFill>
+                  <a:srgbClr val="0093A1"/>
+                </a:solidFill>
+                <a:effectLst/>
+              </a:rPr>
+              <a:t>      "</a:t>
+            </a:r>
+            <a:r>
+              <a:rPr lang="en-US" dirty="0" err="1">
+                <a:solidFill>
+                  <a:srgbClr val="0093A1"/>
+                </a:solidFill>
+                <a:effectLst/>
+              </a:rPr>
+              <a:t>BackgroundImage</a:t>
+            </a:r>
+            <a:r>
+              <a:rPr lang="en-US" dirty="0">
+                <a:solidFill>
+                  <a:srgbClr val="0093A1"/>
+                </a:solidFill>
+                <a:effectLst/>
+              </a:rPr>
+              <a:t>": "https://</a:t>
+            </a:r>
+            <a:r>
+              <a:rPr lang="en-US" dirty="0" err="1">
+                <a:solidFill>
+                  <a:srgbClr val="0093A1"/>
+                </a:solidFill>
+                <a:effectLst/>
+              </a:rPr>
+              <a:t>archives.bulbagarden.net</a:t>
+            </a:r>
+            <a:r>
+              <a:rPr lang="en-US" dirty="0">
+                <a:solidFill>
+                  <a:srgbClr val="0093A1"/>
+                </a:solidFill>
+                <a:effectLst/>
+              </a:rPr>
+              <a:t>/media/upload/8/8d/</a:t>
+            </a:r>
+            <a:r>
+              <a:rPr lang="en-US" dirty="0" err="1">
+                <a:solidFill>
+                  <a:srgbClr val="0093A1"/>
+                </a:solidFill>
+                <a:effectLst/>
+              </a:rPr>
+              <a:t>Vermilion_City_FRLG.png</a:t>
+            </a:r>
+            <a:r>
+              <a:rPr lang="en-US" dirty="0">
+                <a:solidFill>
+                  <a:srgbClr val="0093A1"/>
+                </a:solidFill>
+                <a:effectLst/>
+              </a:rPr>
+              <a:t>"</a:t>
+            </a:r>
+            <a:br>
+              <a:rPr lang="en-US" dirty="0">
+                <a:solidFill>
+                  <a:srgbClr val="0093A1"/>
+                </a:solidFill>
+                <a:effectLst/>
+              </a:rPr>
+            </a:br>
+            <a:r>
+              <a:rPr lang="en-US" dirty="0">
+                <a:solidFill>
+                  <a:srgbClr val="0093A1"/>
+                </a:solidFill>
+                <a:effectLst/>
+              </a:rPr>
+              <a:t>    }</a:t>
             </a:r>
             <a:br>
               <a:rPr lang="en-US" dirty="0">
@@ -33746,7 +34132,7 @@
           <a:p>
             <a:r>
               <a:rPr lang="en-US" dirty="0"/>
-              <a:t>7 Jaar dotnet</a:t>
+              <a:t>8 Jaar dotnet</a:t>
             </a:r>
           </a:p>
           <a:p>
@@ -43963,6 +44349,224 @@
 </file>
 
 <file path=ppt/slides/slide56.xml><?xml version="1.0" encoding="utf-8"?>
+<p:sld xmlns:a="http://schemas.openxmlformats.org/drawingml/2006/main" xmlns:r="http://schemas.openxmlformats.org/officeDocument/2006/relationships" xmlns:p="http://schemas.openxmlformats.org/presentationml/2006/main">
+  <p:cSld>
+    <p:spTree>
+      <p:nvGrpSpPr>
+        <p:cNvPr id="1" name=""/>
+        <p:cNvGrpSpPr/>
+        <p:nvPr/>
+      </p:nvGrpSpPr>
+      <p:grpSpPr>
+        <a:xfrm>
+          <a:off x="0" y="0"/>
+          <a:ext cx="0" cy="0"/>
+          <a:chOff x="0" y="0"/>
+          <a:chExt cx="0" cy="0"/>
+        </a:xfrm>
+      </p:grpSpPr>
+      <p:sp>
+        <p:nvSpPr>
+          <p:cNvPr id="2" name="Title 1">
+            <a:extLst>
+              <a:ext uri="{FF2B5EF4-FFF2-40B4-BE49-F238E27FC236}">
+                <a16:creationId xmlns:a16="http://schemas.microsoft.com/office/drawing/2014/main" id="{F60214AD-D20D-0B0B-F904-13885172F1E8}"/>
+              </a:ext>
+            </a:extLst>
+          </p:cNvPr>
+          <p:cNvSpPr>
+            <a:spLocks noGrp="1"/>
+          </p:cNvSpPr>
+          <p:nvPr>
+            <p:ph type="title"/>
+          </p:nvPr>
+        </p:nvSpPr>
+        <p:spPr/>
+        <p:txBody>
+          <a:bodyPr/>
+          <a:lstStyle/>
+          <a:p>
+            <a:r>
+              <a:rPr lang="en-US" dirty="0"/>
+              <a:t>Shameless self promotion</a:t>
+            </a:r>
+          </a:p>
+        </p:txBody>
+      </p:sp>
+      <p:sp>
+        <p:nvSpPr>
+          <p:cNvPr id="3" name="Text Placeholder 2">
+            <a:extLst>
+              <a:ext uri="{FF2B5EF4-FFF2-40B4-BE49-F238E27FC236}">
+                <a16:creationId xmlns:a16="http://schemas.microsoft.com/office/drawing/2014/main" id="{F7734C5B-854B-0EC9-0E83-FF6FF5DAA602}"/>
+              </a:ext>
+            </a:extLst>
+          </p:cNvPr>
+          <p:cNvSpPr>
+            <a:spLocks noGrp="1"/>
+          </p:cNvSpPr>
+          <p:nvPr>
+            <p:ph type="body" idx="1"/>
+          </p:nvPr>
+        </p:nvSpPr>
+        <p:spPr/>
+        <p:txBody>
+          <a:bodyPr/>
+          <a:lstStyle/>
+          <a:p>
+            <a:r>
+              <a:rPr lang="en-US" dirty="0"/>
+              <a:t>For charity and profit!</a:t>
+            </a:r>
+          </a:p>
+        </p:txBody>
+      </p:sp>
+    </p:spTree>
+    <p:extLst>
+      <p:ext uri="{BB962C8B-B14F-4D97-AF65-F5344CB8AC3E}">
+        <p14:creationId xmlns:p14="http://schemas.microsoft.com/office/powerpoint/2010/main" val="3381374977"/>
+      </p:ext>
+    </p:extLst>
+  </p:cSld>
+  <p:clrMapOvr>
+    <a:masterClrMapping/>
+  </p:clrMapOvr>
+</p:sld>
+</file>
+
+<file path=ppt/slides/slide57.xml><?xml version="1.0" encoding="utf-8"?>
+<p:sld xmlns:a="http://schemas.openxmlformats.org/drawingml/2006/main" xmlns:r="http://schemas.openxmlformats.org/officeDocument/2006/relationships" xmlns:p="http://schemas.openxmlformats.org/presentationml/2006/main">
+  <p:cSld>
+    <p:spTree>
+      <p:nvGrpSpPr>
+        <p:cNvPr id="1" name=""/>
+        <p:cNvGrpSpPr/>
+        <p:nvPr/>
+      </p:nvGrpSpPr>
+      <p:grpSpPr>
+        <a:xfrm>
+          <a:off x="0" y="0"/>
+          <a:ext cx="0" cy="0"/>
+          <a:chOff x="0" y="0"/>
+          <a:chExt cx="0" cy="0"/>
+        </a:xfrm>
+      </p:grpSpPr>
+      <p:pic>
+        <p:nvPicPr>
+          <p:cNvPr id="3" name="Picture 2">
+            <a:extLst>
+              <a:ext uri="{FF2B5EF4-FFF2-40B4-BE49-F238E27FC236}">
+                <a16:creationId xmlns:a16="http://schemas.microsoft.com/office/drawing/2014/main" id="{94AE97B6-37ED-BC83-4674-D66255681451}"/>
+              </a:ext>
+            </a:extLst>
+          </p:cNvPr>
+          <p:cNvPicPr>
+            <a:picLocks noChangeAspect="1"/>
+          </p:cNvPicPr>
+          <p:nvPr/>
+        </p:nvPicPr>
+        <p:blipFill>
+          <a:blip r:embed="rId2">
+            <a:extLst>
+              <a:ext uri="{28A0092B-C50C-407E-A947-70E740481C1C}">
+                <a14:useLocalDpi xmlns:a14="http://schemas.microsoft.com/office/drawing/2010/main" val="0"/>
+              </a:ext>
+            </a:extLst>
+          </a:blip>
+          <a:stretch>
+            <a:fillRect/>
+          </a:stretch>
+        </p:blipFill>
+        <p:spPr>
+          <a:xfrm>
+            <a:off x="3681292" y="0"/>
+            <a:ext cx="4829415" cy="6858000"/>
+          </a:xfrm>
+          <a:prstGeom prst="rect">
+            <a:avLst/>
+          </a:prstGeom>
+        </p:spPr>
+      </p:pic>
+    </p:spTree>
+    <p:extLst>
+      <p:ext uri="{BB962C8B-B14F-4D97-AF65-F5344CB8AC3E}">
+        <p14:creationId xmlns:p14="http://schemas.microsoft.com/office/powerpoint/2010/main" val="442516674"/>
+      </p:ext>
+    </p:extLst>
+  </p:cSld>
+  <p:clrMapOvr>
+    <a:masterClrMapping/>
+  </p:clrMapOvr>
+</p:sld>
+</file>
+
+<file path=ppt/slides/slide58.xml><?xml version="1.0" encoding="utf-8"?>
+<p:sld xmlns:a="http://schemas.openxmlformats.org/drawingml/2006/main" xmlns:r="http://schemas.openxmlformats.org/officeDocument/2006/relationships" xmlns:p="http://schemas.openxmlformats.org/presentationml/2006/main">
+  <p:cSld>
+    <p:spTree>
+      <p:nvGrpSpPr>
+        <p:cNvPr id="1" name=""/>
+        <p:cNvGrpSpPr/>
+        <p:nvPr/>
+      </p:nvGrpSpPr>
+      <p:grpSpPr>
+        <a:xfrm>
+          <a:off x="0" y="0"/>
+          <a:ext cx="0" cy="0"/>
+          <a:chOff x="0" y="0"/>
+          <a:chExt cx="0" cy="0"/>
+        </a:xfrm>
+      </p:grpSpPr>
+      <p:pic>
+        <p:nvPicPr>
+          <p:cNvPr id="3" name="Picture 2">
+            <a:extLst>
+              <a:ext uri="{FF2B5EF4-FFF2-40B4-BE49-F238E27FC236}">
+                <a16:creationId xmlns:a16="http://schemas.microsoft.com/office/drawing/2014/main" id="{3B507230-B64A-A16E-8100-288FD0587288}"/>
+              </a:ext>
+            </a:extLst>
+          </p:cNvPr>
+          <p:cNvPicPr>
+            <a:picLocks noChangeAspect="1"/>
+          </p:cNvPicPr>
+          <p:nvPr/>
+        </p:nvPicPr>
+        <p:blipFill>
+          <a:blip r:embed="rId2">
+            <a:extLst>
+              <a:ext uri="{28A0092B-C50C-407E-A947-70E740481C1C}">
+                <a14:useLocalDpi xmlns:a14="http://schemas.microsoft.com/office/drawing/2010/main" val="0"/>
+              </a:ext>
+            </a:extLst>
+          </a:blip>
+          <a:stretch>
+            <a:fillRect/>
+          </a:stretch>
+        </p:blipFill>
+        <p:spPr>
+          <a:xfrm>
+            <a:off x="3681292" y="0"/>
+            <a:ext cx="4829415" cy="6858000"/>
+          </a:xfrm>
+          <a:prstGeom prst="rect">
+            <a:avLst/>
+          </a:prstGeom>
+        </p:spPr>
+      </p:pic>
+    </p:spTree>
+    <p:extLst>
+      <p:ext uri="{BB962C8B-B14F-4D97-AF65-F5344CB8AC3E}">
+        <p14:creationId xmlns:p14="http://schemas.microsoft.com/office/powerpoint/2010/main" val="3178388464"/>
+      </p:ext>
+    </p:extLst>
+  </p:cSld>
+  <p:clrMapOvr>
+    <a:masterClrMapping/>
+  </p:clrMapOvr>
+</p:sld>
+</file>
+
+<file path=ppt/slides/slide59.xml><?xml version="1.0" encoding="utf-8"?>
 <p:sld xmlns:a="http://schemas.openxmlformats.org/drawingml/2006/main" xmlns:r="http://schemas.openxmlformats.org/officeDocument/2006/relationships" xmlns:p="http://schemas.openxmlformats.org/presentationml/2006/main">
   <p:cSld>
     <p:spTree>
@@ -45284,12 +45888,6 @@
 </file>
 
 <file path=customXml/item1.xml><?xml version="1.0" encoding="utf-8"?>
-<p:properties xmlns:p="http://schemas.microsoft.com/office/2006/metadata/properties" xmlns:xsi="http://www.w3.org/2001/XMLSchema-instance" xmlns:pc="http://schemas.microsoft.com/office/infopath/2007/PartnerControls">
-  <documentManagement/>
-</p:properties>
-</file>
-
-<file path=customXml/item2.xml><?xml version="1.0" encoding="utf-8"?>
 <?mso-contentType ?>
 <FormTemplates xmlns="http://schemas.microsoft.com/sharepoint/v3/contenttype/forms">
   <Display>DocumentLibraryForm</Display>
@@ -45298,7 +45896,7 @@
 </FormTemplates>
 </file>
 
-<file path=customXml/item3.xml><?xml version="1.0" encoding="utf-8"?>
+<file path=customXml/item2.xml><?xml version="1.0" encoding="utf-8"?>
 <ct:contentTypeSchema xmlns:ct="http://schemas.microsoft.com/office/2006/metadata/contentType" xmlns:ma="http://schemas.microsoft.com/office/2006/metadata/properties/metaAttributes" ct:_="" ma:_="" ma:contentTypeName="Document" ma:contentTypeID="0x010100CA3C9371537DC34A9D80E25F165B099C" ma:contentTypeVersion="2" ma:contentTypeDescription="Create a new document." ma:contentTypeScope="" ma:versionID="f3d787210d8e660ab22e53bf6ee10571">
   <xsd:schema xmlns:xsd="http://www.w3.org/2001/XMLSchema" xmlns:xs="http://www.w3.org/2001/XMLSchema" xmlns:p="http://schemas.microsoft.com/office/2006/metadata/properties" xmlns:ns2="c3aa38ca-e898-4ff2-b3ec-d3b89334d165" targetNamespace="http://schemas.microsoft.com/office/2006/metadata/properties" ma:root="true" ma:fieldsID="a77d9b218da29adfd3973844f42c08d4" ns2:_="">
     <xsd:import namespace="c3aa38ca-e898-4ff2-b3ec-d3b89334d165"/>
@@ -45430,23 +46028,13 @@
 </ct:contentTypeSchema>
 </file>
 
-<file path=customXml/itemProps1.xml><?xml version="1.0" encoding="utf-8"?>
-<ds:datastoreItem xmlns:ds="http://schemas.openxmlformats.org/officeDocument/2006/customXml" ds:itemID="{F8AE8C2F-0717-4D42-B44A-CAECCF122A1A}">
-  <ds:schemaRefs>
-    <ds:schemaRef ds:uri="http://schemas.openxmlformats.org/package/2006/metadata/core-properties"/>
-    <ds:schemaRef ds:uri="http://schemas.microsoft.com/office/2006/metadata/properties"/>
-    <ds:schemaRef ds:uri="http://www.w3.org/XML/1998/namespace"/>
-    <ds:schemaRef ds:uri="http://purl.org/dc/terms/"/>
-    <ds:schemaRef ds:uri="http://schemas.microsoft.com/office/2006/documentManagement/types"/>
-    <ds:schemaRef ds:uri="c3aa38ca-e898-4ff2-b3ec-d3b89334d165"/>
-    <ds:schemaRef ds:uri="http://purl.org/dc/dcmitype/"/>
-    <ds:schemaRef ds:uri="http://purl.org/dc/elements/1.1/"/>
-    <ds:schemaRef ds:uri="http://schemas.microsoft.com/office/infopath/2007/PartnerControls"/>
-  </ds:schemaRefs>
-</ds:datastoreItem>
+<file path=customXml/item3.xml><?xml version="1.0" encoding="utf-8"?>
+<p:properties xmlns:p="http://schemas.microsoft.com/office/2006/metadata/properties" xmlns:xsi="http://www.w3.org/2001/XMLSchema-instance" xmlns:pc="http://schemas.microsoft.com/office/infopath/2007/PartnerControls">
+  <documentManagement/>
+</p:properties>
 </file>
 
-<file path=customXml/itemProps2.xml><?xml version="1.0" encoding="utf-8"?>
+<file path=customXml/itemProps1.xml><?xml version="1.0" encoding="utf-8"?>
 <ds:datastoreItem xmlns:ds="http://schemas.openxmlformats.org/officeDocument/2006/customXml" ds:itemID="{4522A51C-073F-4C45-9170-ECE5951F4DEA}">
   <ds:schemaRefs>
     <ds:schemaRef ds:uri="http://schemas.microsoft.com/sharepoint/v3/contenttype/forms"/>
@@ -45454,7 +46042,7 @@
 </ds:datastoreItem>
 </file>
 
-<file path=customXml/itemProps3.xml><?xml version="1.0" encoding="utf-8"?>
+<file path=customXml/itemProps2.xml><?xml version="1.0" encoding="utf-8"?>
 <ds:datastoreItem xmlns:ds="http://schemas.openxmlformats.org/officeDocument/2006/customXml" ds:itemID="{3DE7B56F-59C8-4148-BA7E-89984C36B7DA}">
   <ds:schemaRefs>
     <ds:schemaRef ds:uri="http://schemas.microsoft.com/office/2006/metadata/contentType"/>
@@ -45470,4 +46058,20 @@
     <ds:schemaRef ds:uri="http://schemas.microsoft.com/internal/obd"/>
   </ds:schemaRefs>
 </ds:datastoreItem>
+</file>
+
+<file path=customXml/itemProps3.xml><?xml version="1.0" encoding="utf-8"?>
+<ds:datastoreItem xmlns:ds="http://schemas.openxmlformats.org/officeDocument/2006/customXml" ds:itemID="{F8AE8C2F-0717-4D42-B44A-CAECCF122A1A}">
+  <ds:schemaRefs>
+    <ds:schemaRef ds:uri="http://schemas.openxmlformats.org/package/2006/metadata/core-properties"/>
+    <ds:schemaRef ds:uri="http://schemas.microsoft.com/office/2006/metadata/properties"/>
+    <ds:schemaRef ds:uri="http://www.w3.org/XML/1998/namespace"/>
+    <ds:schemaRef ds:uri="http://purl.org/dc/terms/"/>
+    <ds:schemaRef ds:uri="http://schemas.microsoft.com/office/2006/documentManagement/types"/>
+    <ds:schemaRef ds:uri="c3aa38ca-e898-4ff2-b3ec-d3b89334d165"/>
+    <ds:schemaRef ds:uri="http://purl.org/dc/dcmitype/"/>
+    <ds:schemaRef ds:uri="http://purl.org/dc/elements/1.1/"/>
+    <ds:schemaRef ds:uri="http://schemas.microsoft.com/office/infopath/2007/PartnerControls"/>
+  </ds:schemaRefs>
+</ds:datastoreItem>
 </file>